--- a/docs/storeall-data-story-jul-2026.pptx
+++ b/docs/storeall-data-story-jul-2026.pptx
@@ -3471,7 +3471,7 @@
                 </a:solidFill>
                 <a:latin typeface="Arial"/>
               </a:rPr>
-              <a:t>We are sold out — 6 units left across 985.</a:t>
+              <a:t>We are sold out — 6 units left across 996.</a:t>
             </a:r>
           </a:p>
         </p:txBody>
@@ -9538,7 +9538,7 @@
                 </a:solidFill>
                 <a:latin typeface="Arial"/>
               </a:rPr>
-              <a:t>976 of 982 rentable units filled — physical occupancy 99.1% of all 985</a:t>
+              <a:t>976 of 982 rentable units filled — 98.0% of all 996 (14 out of service)</a:t>
             </a:r>
           </a:p>
         </p:txBody>
